--- a/index/designs/y7-l10/l5-minutes-to/l5-minutes-to.pptx
+++ b/index/designs/y7-l10/l5-minutes-to/l5-minutes-to.pptx
@@ -18064,9 +18064,6 @@
               </a:rPr>
               <a:t>15 分钟 </a:t>
             </a:r>
-            <a:pPr algn="l" indent="0" marL="0">
-              <a:buNone/>
-            </a:pPr>
             <a:r>
               <a:rPr lang="en-US" sz="800" b="1" dirty="0">
                 <a:solidFill>
